--- a/dist/sunum/serbest-dusme.pptx
+++ b/dist/sunum/serbest-dusme.pptx
@@ -4260,7 +4260,7 @@
                 <a:ea typeface="Calibri" pitchFamily="34" charset="-122"/>
                 <a:cs typeface="Calibri" pitchFamily="34" charset="-120"/>
               </a:rPr>
-              <a:t>FİZİK · KİNEMATİK</a:t>
+              <a:t>KUVVET VE HAREKET · KONU 02</a:t>
             </a:r>
             <a:endParaRPr lang="en-US" sz="1300" dirty="0"/>
           </a:p>
@@ -5352,7 +5352,7 @@
                 <a:ea typeface="Calibri" pitchFamily="34" charset="-122"/>
                 <a:cs typeface="Calibri" pitchFamily="34" charset="-120"/>
               </a:rPr>
-              <a:t>Serbest düşme · dersler.perinet.org</a:t>
+              <a:t>Kuvvet ve Hareket · Konu 02 · Serbest düşme</a:t>
             </a:r>
             <a:endParaRPr lang="en-US" sz="1050" dirty="0"/>
           </a:p>
@@ -6338,7 +6338,7 @@
                 <a:ea typeface="Calibri" pitchFamily="34" charset="-122"/>
                 <a:cs typeface="Calibri" pitchFamily="34" charset="-120"/>
               </a:rPr>
-              <a:t>Serbest düşme · dersler.perinet.org</a:t>
+              <a:t>Kuvvet ve Hareket · Konu 02 · Serbest düşme</a:t>
             </a:r>
             <a:endParaRPr lang="en-US" sz="1050" dirty="0"/>
           </a:p>
@@ -7399,7 +7399,7 @@
                 <a:ea typeface="Calibri" pitchFamily="34" charset="-122"/>
                 <a:cs typeface="Calibri" pitchFamily="34" charset="-120"/>
               </a:rPr>
-              <a:t>Serbest düşme · dersler.perinet.org</a:t>
+              <a:t>Kuvvet ve Hareket · Konu 02 · Serbest düşme</a:t>
             </a:r>
             <a:endParaRPr lang="en-US" sz="1050" dirty="0"/>
           </a:p>
@@ -8791,7 +8791,7 @@
                 <a:ea typeface="Calibri" pitchFamily="34" charset="-122"/>
                 <a:cs typeface="Calibri" pitchFamily="34" charset="-120"/>
               </a:rPr>
-              <a:t>Serbest düşme · dersler.perinet.org</a:t>
+              <a:t>Kuvvet ve Hareket · Konu 02 · Serbest düşme</a:t>
             </a:r>
             <a:endParaRPr lang="en-US" sz="1050" dirty="0"/>
           </a:p>
@@ -10706,7 +10706,7 @@
                 <a:ea typeface="Calibri" pitchFamily="34" charset="-122"/>
                 <a:cs typeface="Calibri" pitchFamily="34" charset="-120"/>
               </a:rPr>
-              <a:t>Serbest düşme · dersler.perinet.org</a:t>
+              <a:t>Kuvvet ve Hareket · Konu 02 · Serbest düşme</a:t>
             </a:r>
             <a:endParaRPr lang="en-US" sz="1050" dirty="0"/>
           </a:p>
@@ -12084,7 +12084,7 @@
                 <a:ea typeface="Calibri" pitchFamily="34" charset="-122"/>
                 <a:cs typeface="Calibri" pitchFamily="34" charset="-120"/>
               </a:rPr>
-              <a:t>Serbest düşme · dersler.perinet.org</a:t>
+              <a:t>Kuvvet ve Hareket · Konu 02 · Serbest düşme</a:t>
             </a:r>
             <a:endParaRPr lang="en-US" sz="1050" dirty="0"/>
           </a:p>
@@ -13098,7 +13098,7 @@
                 <a:ea typeface="Calibri" pitchFamily="34" charset="-122"/>
                 <a:cs typeface="Calibri" pitchFamily="34" charset="-120"/>
               </a:rPr>
-              <a:t>Serbest düşme · dersler.perinet.org</a:t>
+              <a:t>Kuvvet ve Hareket · Konu 02 · Serbest düşme</a:t>
             </a:r>
             <a:endParaRPr lang="en-US" sz="1050" dirty="0"/>
           </a:p>
@@ -14172,7 +14172,7 @@
                 <a:ea typeface="Calibri" pitchFamily="34" charset="-122"/>
                 <a:cs typeface="Calibri" pitchFamily="34" charset="-120"/>
               </a:rPr>
-              <a:t>Serbest düşme · dersler.perinet.org</a:t>
+              <a:t>Kuvvet ve Hareket · Konu 02 · Serbest düşme</a:t>
             </a:r>
             <a:endParaRPr lang="en-US" sz="1050" dirty="0"/>
           </a:p>
@@ -14667,7 +14667,7 @@
                 <a:ea typeface="Calibri" pitchFamily="34" charset="-122"/>
                 <a:cs typeface="Calibri" pitchFamily="34" charset="-120"/>
               </a:rPr>
-              <a:t>Serbest düşme · dersler.perinet.org</a:t>
+              <a:t>Kuvvet ve Hareket · Konu 02 · Serbest düşme</a:t>
             </a:r>
             <a:endParaRPr lang="en-US" sz="1050" dirty="0"/>
           </a:p>
@@ -15274,7 +15274,7 @@
                 <a:ea typeface="Calibri" pitchFamily="34" charset="-122"/>
                 <a:cs typeface="Calibri" pitchFamily="34" charset="-120"/>
               </a:rPr>
-              <a:t>Serbest düşme · dersler.perinet.org</a:t>
+              <a:t>Kuvvet ve Hareket · Konu 02 · Serbest düşme</a:t>
             </a:r>
             <a:endParaRPr lang="en-US" sz="1050" dirty="0"/>
           </a:p>
@@ -16125,7 +16125,7 @@
                 <a:ea typeface="Calibri" pitchFamily="34" charset="-122"/>
                 <a:cs typeface="Calibri" pitchFamily="34" charset="-120"/>
               </a:rPr>
-              <a:t>Serbest düşme · dersler.perinet.org</a:t>
+              <a:t>Kuvvet ve Hareket · Konu 02 · Serbest düşme</a:t>
             </a:r>
             <a:endParaRPr lang="en-US" sz="1050" dirty="0"/>
           </a:p>
@@ -16943,7 +16943,7 @@
                 <a:ea typeface="Calibri" pitchFamily="34" charset="-122"/>
                 <a:cs typeface="Calibri" pitchFamily="34" charset="-120"/>
               </a:rPr>
-              <a:t>Serbest düşme · dersler.perinet.org</a:t>
+              <a:t>Kuvvet ve Hareket · Konu 02 · Serbest düşme</a:t>
             </a:r>
             <a:endParaRPr lang="en-US" sz="1050" dirty="0"/>
           </a:p>

--- a/dist/sunum/serbest-dusme.pptx
+++ b/dist/sunum/serbest-dusme.pptx
@@ -4260,7 +4260,7 @@
                 <a:ea typeface="Calibri" pitchFamily="34" charset="-122"/>
                 <a:cs typeface="Calibri" pitchFamily="34" charset="-120"/>
               </a:rPr>
-              <a:t>KUVVET VE HAREKET · KONU 02</a:t>
+              <a:t>KUVVET VE HAREKET · KONU 01</a:t>
             </a:r>
             <a:endParaRPr lang="en-US" sz="1300" dirty="0"/>
           </a:p>
@@ -5352,7 +5352,7 @@
                 <a:ea typeface="Calibri" pitchFamily="34" charset="-122"/>
                 <a:cs typeface="Calibri" pitchFamily="34" charset="-120"/>
               </a:rPr>
-              <a:t>Kuvvet ve Hareket · Konu 02 · Serbest düşme</a:t>
+              <a:t>Kuvvet ve Hareket · Konu 01 · Serbest düşme</a:t>
             </a:r>
             <a:endParaRPr lang="en-US" sz="1050" dirty="0"/>
           </a:p>
@@ -6338,7 +6338,7 @@
                 <a:ea typeface="Calibri" pitchFamily="34" charset="-122"/>
                 <a:cs typeface="Calibri" pitchFamily="34" charset="-120"/>
               </a:rPr>
-              <a:t>Kuvvet ve Hareket · Konu 02 · Serbest düşme</a:t>
+              <a:t>Kuvvet ve Hareket · Konu 01 · Serbest düşme</a:t>
             </a:r>
             <a:endParaRPr lang="en-US" sz="1050" dirty="0"/>
           </a:p>
@@ -7399,7 +7399,7 @@
                 <a:ea typeface="Calibri" pitchFamily="34" charset="-122"/>
                 <a:cs typeface="Calibri" pitchFamily="34" charset="-120"/>
               </a:rPr>
-              <a:t>Kuvvet ve Hareket · Konu 02 · Serbest düşme</a:t>
+              <a:t>Kuvvet ve Hareket · Konu 01 · Serbest düşme</a:t>
             </a:r>
             <a:endParaRPr lang="en-US" sz="1050" dirty="0"/>
           </a:p>
@@ -8791,7 +8791,7 @@
                 <a:ea typeface="Calibri" pitchFamily="34" charset="-122"/>
                 <a:cs typeface="Calibri" pitchFamily="34" charset="-120"/>
               </a:rPr>
-              <a:t>Kuvvet ve Hareket · Konu 02 · Serbest düşme</a:t>
+              <a:t>Kuvvet ve Hareket · Konu 01 · Serbest düşme</a:t>
             </a:r>
             <a:endParaRPr lang="en-US" sz="1050" dirty="0"/>
           </a:p>
@@ -10706,7 +10706,7 @@
                 <a:ea typeface="Calibri" pitchFamily="34" charset="-122"/>
                 <a:cs typeface="Calibri" pitchFamily="34" charset="-120"/>
               </a:rPr>
-              <a:t>Kuvvet ve Hareket · Konu 02 · Serbest düşme</a:t>
+              <a:t>Kuvvet ve Hareket · Konu 01 · Serbest düşme</a:t>
             </a:r>
             <a:endParaRPr lang="en-US" sz="1050" dirty="0"/>
           </a:p>
@@ -12084,7 +12084,7 @@
                 <a:ea typeface="Calibri" pitchFamily="34" charset="-122"/>
                 <a:cs typeface="Calibri" pitchFamily="34" charset="-120"/>
               </a:rPr>
-              <a:t>Kuvvet ve Hareket · Konu 02 · Serbest düşme</a:t>
+              <a:t>Kuvvet ve Hareket · Konu 01 · Serbest düşme</a:t>
             </a:r>
             <a:endParaRPr lang="en-US" sz="1050" dirty="0"/>
           </a:p>
@@ -13098,7 +13098,7 @@
                 <a:ea typeface="Calibri" pitchFamily="34" charset="-122"/>
                 <a:cs typeface="Calibri" pitchFamily="34" charset="-120"/>
               </a:rPr>
-              <a:t>Kuvvet ve Hareket · Konu 02 · Serbest düşme</a:t>
+              <a:t>Kuvvet ve Hareket · Konu 01 · Serbest düşme</a:t>
             </a:r>
             <a:endParaRPr lang="en-US" sz="1050" dirty="0"/>
           </a:p>
@@ -14172,7 +14172,7 @@
                 <a:ea typeface="Calibri" pitchFamily="34" charset="-122"/>
                 <a:cs typeface="Calibri" pitchFamily="34" charset="-120"/>
               </a:rPr>
-              <a:t>Kuvvet ve Hareket · Konu 02 · Serbest düşme</a:t>
+              <a:t>Kuvvet ve Hareket · Konu 01 · Serbest düşme</a:t>
             </a:r>
             <a:endParaRPr lang="en-US" sz="1050" dirty="0"/>
           </a:p>
@@ -14667,7 +14667,7 @@
                 <a:ea typeface="Calibri" pitchFamily="34" charset="-122"/>
                 <a:cs typeface="Calibri" pitchFamily="34" charset="-120"/>
               </a:rPr>
-              <a:t>Kuvvet ve Hareket · Konu 02 · Serbest düşme</a:t>
+              <a:t>Kuvvet ve Hareket · Konu 01 · Serbest düşme</a:t>
             </a:r>
             <a:endParaRPr lang="en-US" sz="1050" dirty="0"/>
           </a:p>
@@ -15274,7 +15274,7 @@
                 <a:ea typeface="Calibri" pitchFamily="34" charset="-122"/>
                 <a:cs typeface="Calibri" pitchFamily="34" charset="-120"/>
               </a:rPr>
-              <a:t>Kuvvet ve Hareket · Konu 02 · Serbest düşme</a:t>
+              <a:t>Kuvvet ve Hareket · Konu 01 · Serbest düşme</a:t>
             </a:r>
             <a:endParaRPr lang="en-US" sz="1050" dirty="0"/>
           </a:p>
@@ -16125,7 +16125,7 @@
                 <a:ea typeface="Calibri" pitchFamily="34" charset="-122"/>
                 <a:cs typeface="Calibri" pitchFamily="34" charset="-120"/>
               </a:rPr>
-              <a:t>Kuvvet ve Hareket · Konu 02 · Serbest düşme</a:t>
+              <a:t>Kuvvet ve Hareket · Konu 01 · Serbest düşme</a:t>
             </a:r>
             <a:endParaRPr lang="en-US" sz="1050" dirty="0"/>
           </a:p>
@@ -16943,7 +16943,7 @@
                 <a:ea typeface="Calibri" pitchFamily="34" charset="-122"/>
                 <a:cs typeface="Calibri" pitchFamily="34" charset="-120"/>
               </a:rPr>
-              <a:t>Kuvvet ve Hareket · Konu 02 · Serbest düşme</a:t>
+              <a:t>Kuvvet ve Hareket · Konu 01 · Serbest düşme</a:t>
             </a:r>
             <a:endParaRPr lang="en-US" sz="1050" dirty="0"/>
           </a:p>

--- a/dist/sunum/serbest-dusme.pptx
+++ b/dist/sunum/serbest-dusme.pptx
@@ -3522,7 +3522,7 @@
 01 Önce gözlemle: düşen bir cisim ne yapar?
 02 Serbest düşme nedir?
 03 Kütle neden fark etmez?
-Görsel: Düşen bir elmanın eşit zaman aralıklarıyla çekilmiş görüntüleri. Elma her aralıkta bir öncekinden daha uzun yol alıyor; ilk görüntüler neredeyse üst üste binerken sonrakiler iyice açılıyor. Bu görselde aralıklar tam olarak 1 : 3 : 5 oranında: elmanın konumları, sahne yapay zekâyla üretildikten sonra y = ½·g·t² bağıntısına göre yerleştirildi. Bu kuralı ikinci basamakta kanıtlayacağız.</a:t>
+Görsel: Düşen bir elmanın eşit zaman aralıklarıyla çekilmiş görüntüleri. Elma her aralıkta bir öncekinden daha uzun yol alıyor; ilk görüntüler neredeyse üst üste binerken sonrakiler iyice açılıyor. Bu görselde aralıklar tam olarak 1 : 3 : 5 oranında: elmaların konumları y = ½·g·t² bağıntısına göre yerleştirildi. Bu kuralı ikinci basamakta kanıtlayacağız.</a:t>
             </a:r>
             <a:endParaRPr lang="en-US" dirty="0"/>
           </a:p>
@@ -3614,7 +3614,7 @@
 Kısaca: Düşen bir cisim düşey doğrultuda ve giderek hızlanarak iner. Eşit sürelerde alınan yolların büyümesi bu hızlanmanın izidir.
 Elindeki anahtarı bırak. Önce yavaş ayrılır, sonra giderek hızlanarak yere çarpar. Bu hızlanmayı gözle izlemek zordur, çünkü her şey bir saniyeden kısa sürer. Fizikçiler bu yüzden düşüşü strobo fotoğrafla incelemeyi sever: karanlık bir odada, eşit aralıklarla (örneğin saniyede on kez) yanıp sönen bir ışık altında tek bir fotoğraf çekilir ve cismin her an bulunduğu yer aynı karede üst üste görünür.
 Böyle bir fotoğrafta ilk dikkat çeken şey şudur: görüntüler arasındaki boşluklar eşit değildir, aşağı indikçe açılır. Eşit sürelerde giderek daha uzun yol alınıyorsa cisim hızlanıyor demektir. Sabit hızla giden bir araba aynı yöntemle fotoğraflansaydı görüntüler cetvel çizgileri gibi eşit aralıklı dizilirdi.
-Görsel: Düşen bir elmanın eşit zaman aralıklarıyla çekilmiş görüntüleri. Elma her aralıkta bir öncekinden daha uzun yol alıyor; ilk görüntüler neredeyse üst üste binerken sonrakiler iyice açılıyor. Bu görselde aralıklar tam olarak 1 : 3 : 5 oranında: elmanın konumları, sahne yapay zekâyla üretildikten sonra y = ½·g·t² bağıntısına göre yerleştirildi. Bu kuralı ikinci basamakta kanıtlayacağız.
+Görsel: Düşen bir elmanın eşit zaman aralıklarıyla çekilmiş görüntüleri. Elma her aralıkta bir öncekinden daha uzun yol alıyor; ilk görüntüler neredeyse üst üste binerken sonrakiler iyice açılıyor. Bu görselde aralıklar tam olarak 1 : 3 : 5 oranında: elmaların konumları y = ½·g·t² bağıntısına göre yerleştirildi. Bu kuralı ikinci basamakta kanıtlayacağız.
 Düşen her cisimde, hava direnci küçük kaldığı sürece, aynı üç şey gözlenir:
 • Doğrultu düşeydir: cisim şakül ipi gibi dümdüz aşağı iner.
 • Hız sürekli artar: her saniye bir önceki saniyeden daha hızlıdır.
@@ -4367,7 +4367,7 @@
       </p:grpSpPr>
       <p:pic>
         <p:nvPicPr>
-          <p:cNvPr id="2" name="Image 0" descr="/tmp/claude-1000/-opt-dersler/8a8328c3-841c-44fa-b76f-82572d338d3d/scratchpad/d4/sek/serbest-dusme-kapak.jpg">    </p:cNvPr>
+          <p:cNvPr id="2" name="Image 0" descr="/tmp/claude-1000/-opt-dersler/8a8328c3-841c-44fa-b76f-82572d338d3d/scratchpad/d5/sek/serbest-dusme-kapak.jpg">    </p:cNvPr>
           <p:cNvPicPr>
             <a:picLocks noChangeAspect="1"/>
           </p:cNvPicPr>
@@ -5020,69 +5020,6 @@
         </p:nvSpPr>
         <p:spPr>
           <a:xfrm>
-            <a:off x="9448495" y="6309360"/>
-            <a:ext cx="2103120" cy="274320"/>
-          </a:xfrm>
-          <a:prstGeom prst="roundRect">
-            <a:avLst>
-              <a:gd name="adj" fmla="val 50000"/>
-            </a:avLst>
-          </a:prstGeom>
-          <a:solidFill>
-            <a:srgbClr val="0E1426">
-              <a:alpha val="65000"/>
-            </a:srgbClr>
-          </a:solidFill>
-          <a:ln/>
-        </p:spPr>
-      </p:sp>
-      <p:sp>
-        <p:nvSpPr>
-          <p:cNvPr id="22" name="Text 19"/>
-          <p:cNvSpPr txBox="1"/>
-          <p:nvPr/>
-        </p:nvSpPr>
-        <p:spPr>
-          <a:xfrm>
-            <a:off x="9448495" y="6309360"/>
-            <a:ext cx="2103120" cy="274320"/>
-          </a:xfrm>
-          <a:prstGeom prst="rect">
-            <a:avLst/>
-          </a:prstGeom>
-          <a:noFill/>
-          <a:ln/>
-        </p:spPr>
-        <p:txBody>
-          <a:bodyPr wrap="square" lIns="0" tIns="0" rIns="0" bIns="0" rtlCol="0" anchor="ctr"/>
-          <a:lstStyle/>
-          <a:p>
-            <a:pPr algn="ctr" indent="0" marL="0">
-              <a:buNone/>
-            </a:pPr>
-            <a:r>
-              <a:rPr lang="en-US" sz="900" dirty="0">
-                <a:solidFill>
-                  <a:srgbClr val="E4E9F5"/>
-                </a:solidFill>
-                <a:latin typeface="Calibri" pitchFamily="34" charset="0"/>
-                <a:ea typeface="Calibri" pitchFamily="34" charset="-122"/>
-                <a:cs typeface="Calibri" pitchFamily="34" charset="-120"/>
-              </a:rPr>
-              <a:t>Görsel: yapay zekâ ile üretildi</a:t>
-            </a:r>
-            <a:endParaRPr lang="en-US" sz="900" dirty="0"/>
-          </a:p>
-        </p:txBody>
-      </p:sp>
-      <p:sp>
-        <p:nvSpPr>
-          <p:cNvPr id="23" name="Shape 20"/>
-          <p:cNvSpPr/>
-          <p:nvPr/>
-        </p:nvSpPr>
-        <p:spPr>
-          <a:xfrm>
             <a:off x="640080" y="6382512"/>
             <a:ext cx="128016" cy="128016"/>
           </a:xfrm>
@@ -5099,7 +5036,7 @@
       </p:sp>
       <p:sp>
         <p:nvSpPr>
-          <p:cNvPr id="24" name="Text 21"/>
+          <p:cNvPr id="22" name="Text 19"/>
           <p:cNvSpPr txBox="1"/>
           <p:nvPr/>
         </p:nvSpPr>
@@ -5721,7 +5658,7 @@
       </p:sp>
       <p:pic>
         <p:nvPicPr>
-          <p:cNvPr id="17" name="Image 0" descr="/tmp/claude-1000/-opt-dersler/8a8328c3-841c-44fa-b76f-82572d338d3d/scratchpad/d4/sek/serbest-dusme-02.png">    </p:cNvPr>
+          <p:cNvPr id="17" name="Image 0" descr="/tmp/claude-1000/-opt-dersler/8a8328c3-841c-44fa-b76f-82572d338d3d/scratchpad/d5/sek/serbest-dusme-02.png">    </p:cNvPr>
           <p:cNvPicPr>
             <a:picLocks noChangeAspect="1"/>
           </p:cNvPicPr>
@@ -8679,7 +8616,7 @@
       </p:sp>
       <p:pic>
         <p:nvPicPr>
-          <p:cNvPr id="22" name="Image 0" descr="/tmp/claude-1000/-opt-dersler/8a8328c3-841c-44fa-b76f-82572d338d3d/scratchpad/d4/sek/serbest-dusme-03.png">    </p:cNvPr>
+          <p:cNvPr id="22" name="Image 0" descr="/tmp/claude-1000/-opt-dersler/8a8328c3-841c-44fa-b76f-82572d338d3d/scratchpad/d5/sek/serbest-dusme-03.png">    </p:cNvPr>
           <p:cNvPicPr>
             <a:picLocks noChangeAspect="1"/>
           </p:cNvPicPr>
@@ -15002,7 +14939,7 @@
       </p:sp>
       <p:pic>
         <p:nvPicPr>
-          <p:cNvPr id="12" name="Image 0" descr="/tmp/claude-1000/-opt-dersler/8a8328c3-841c-44fa-b76f-82572d338d3d/scratchpad/d4/sek/serbest-dusme-04.png">    </p:cNvPr>
+          <p:cNvPr id="12" name="Image 0" descr="/tmp/claude-1000/-opt-dersler/8a8328c3-841c-44fa-b76f-82572d338d3d/scratchpad/d5/sek/serbest-dusme-04.png">    </p:cNvPr>
           <p:cNvPicPr>
             <a:picLocks noChangeAspect="1"/>
           </p:cNvPicPr>
@@ -16380,7 +16317,7 @@
       </p:sp>
       <p:pic>
         <p:nvPicPr>
-          <p:cNvPr id="16" name="Image 0" descr="/tmp/claude-1000/-opt-dersler/8a8328c3-841c-44fa-b76f-82572d338d3d/scratchpad/d4/sek/serbest-dusme-05.png">    </p:cNvPr>
+          <p:cNvPr id="16" name="Image 0" descr="/tmp/claude-1000/-opt-dersler/8a8328c3-841c-44fa-b76f-82572d338d3d/scratchpad/d5/sek/serbest-dusme-05.png">    </p:cNvPr>
           <p:cNvPicPr>
             <a:picLocks noChangeAspect="1"/>
           </p:cNvPicPr>
@@ -17048,7 +16985,7 @@
       </p:sp>
       <p:pic>
         <p:nvPicPr>
-          <p:cNvPr id="10" name="Image 0" descr="/tmp/claude-1000/-opt-dersler/8a8328c3-841c-44fa-b76f-82572d338d3d/scratchpad/d4/sek/serbest-dusme-uygulama-kart.jpg">    </p:cNvPr>
+          <p:cNvPr id="10" name="Image 0" descr="/tmp/claude-1000/-opt-dersler/8a8328c3-841c-44fa-b76f-82572d338d3d/scratchpad/d5/sek/serbest-dusme-uygulama-kart.jpg">    </p:cNvPr>
           <p:cNvPicPr>
             <a:picLocks noChangeAspect="1"/>
           </p:cNvPicPr>
@@ -17072,70 +17009,7 @@
       </p:pic>
       <p:sp>
         <p:nvSpPr>
-          <p:cNvPr id="11" name="Shape 8"/>
-          <p:cNvSpPr/>
-          <p:nvPr/>
-        </p:nvSpPr>
-        <p:spPr>
-          <a:xfrm>
-            <a:off x="9704527" y="4198925"/>
-            <a:ext cx="1755648" cy="246888"/>
-          </a:xfrm>
-          <a:prstGeom prst="roundRect">
-            <a:avLst>
-              <a:gd name="adj" fmla="val 48148"/>
-            </a:avLst>
-          </a:prstGeom>
-          <a:solidFill>
-            <a:srgbClr val="0E1426">
-              <a:alpha val="60000"/>
-            </a:srgbClr>
-          </a:solidFill>
-          <a:ln/>
-        </p:spPr>
-      </p:sp>
-      <p:sp>
-        <p:nvSpPr>
-          <p:cNvPr id="12" name="Text 9"/>
-          <p:cNvSpPr txBox="1"/>
-          <p:nvPr/>
-        </p:nvSpPr>
-        <p:spPr>
-          <a:xfrm>
-            <a:off x="9704527" y="4198925"/>
-            <a:ext cx="1755648" cy="246888"/>
-          </a:xfrm>
-          <a:prstGeom prst="rect">
-            <a:avLst/>
-          </a:prstGeom>
-          <a:noFill/>
-          <a:ln/>
-        </p:spPr>
-        <p:txBody>
-          <a:bodyPr wrap="square" lIns="0" tIns="0" rIns="0" bIns="0" rtlCol="0" anchor="ctr"/>
-          <a:lstStyle/>
-          <a:p>
-            <a:pPr algn="ctr" indent="0" marL="0">
-              <a:buNone/>
-            </a:pPr>
-            <a:r>
-              <a:rPr lang="en-US" sz="850" dirty="0">
-                <a:solidFill>
-                  <a:srgbClr val="FFFFFF"/>
-                </a:solidFill>
-                <a:latin typeface="Calibri" pitchFamily="34" charset="0"/>
-                <a:ea typeface="Calibri" pitchFamily="34" charset="-122"/>
-                <a:cs typeface="Calibri" pitchFamily="34" charset="-120"/>
-              </a:rPr>
-              <a:t>Yapay zekâ ile üretildi</a:t>
-            </a:r>
-            <a:endParaRPr lang="en-US" sz="850" dirty="0"/>
-          </a:p>
-        </p:txBody>
-      </p:sp>
-      <p:sp>
-        <p:nvSpPr>
-          <p:cNvPr id="13" name="Text 10"/>
+          <p:cNvPr id="11" name="Text 8"/>
           <p:cNvSpPr txBox="1"/>
           <p:nvPr/>
         </p:nvSpPr>
@@ -17245,7 +17119,7 @@
       </p:sp>
       <p:sp>
         <p:nvSpPr>
-          <p:cNvPr id="14" name="Shape 11"/>
+          <p:cNvPr id="12" name="Shape 9"/>
           <p:cNvSpPr/>
           <p:nvPr/>
         </p:nvSpPr>
@@ -17267,7 +17141,7 @@
       </p:sp>
       <p:sp>
         <p:nvSpPr>
-          <p:cNvPr id="15" name="Text 12"/>
+          <p:cNvPr id="13" name="Text 10"/>
           <p:cNvSpPr txBox="1"/>
           <p:nvPr/>
         </p:nvSpPr>
@@ -17306,7 +17180,7 @@
       </p:sp>
       <p:sp>
         <p:nvSpPr>
-          <p:cNvPr id="16" name="Text 13"/>
+          <p:cNvPr id="14" name="Text 11"/>
           <p:cNvSpPr txBox="1"/>
           <p:nvPr/>
         </p:nvSpPr>
@@ -18010,7 +17884,7 @@
       </p:sp>
       <p:pic>
         <p:nvPicPr>
-          <p:cNvPr id="20" name="Image 0" descr="/tmp/claude-1000/-opt-dersler/8a8328c3-841c-44fa-b76f-82572d338d3d/scratchpad/d4/sek/serbest-dusme-06.png">    </p:cNvPr>
+          <p:cNvPr id="20" name="Image 0" descr="/tmp/claude-1000/-opt-dersler/8a8328c3-841c-44fa-b76f-82572d338d3d/scratchpad/d5/sek/serbest-dusme-06.png">    </p:cNvPr>
           <p:cNvPicPr>
             <a:picLocks noChangeAspect="1"/>
           </p:cNvPicPr>
@@ -19619,7 +19493,7 @@
       </p:sp>
       <p:pic>
         <p:nvPicPr>
-          <p:cNvPr id="12" name="Image 0" descr="/tmp/claude-1000/-opt-dersler/8a8328c3-841c-44fa-b76f-82572d338d3d/scratchpad/d4/sek/serbest-dusme-07.png">    </p:cNvPr>
+          <p:cNvPr id="12" name="Image 0" descr="/tmp/claude-1000/-opt-dersler/8a8328c3-841c-44fa-b76f-82572d338d3d/scratchpad/d5/sek/serbest-dusme-07.png">    </p:cNvPr>
           <p:cNvPicPr>
             <a:picLocks noChangeAspect="1"/>
           </p:cNvPicPr>
@@ -34768,7 +34642,7 @@
       </p:sp>
       <p:pic>
         <p:nvPicPr>
-          <p:cNvPr id="10" name="Image 0" descr="/tmp/claude-1000/-opt-dersler/8a8328c3-841c-44fa-b76f-82572d338d3d/scratchpad/d4/sek/serbest-dusme-gunluk-kart.jpg">    </p:cNvPr>
+          <p:cNvPr id="10" name="Image 0" descr="/tmp/claude-1000/-opt-dersler/8a8328c3-841c-44fa-b76f-82572d338d3d/scratchpad/d5/sek/serbest-dusme-gunluk-kart.jpg">    </p:cNvPr>
           <p:cNvPicPr>
             <a:picLocks noChangeAspect="1"/>
           </p:cNvPicPr>
@@ -34792,70 +34666,7 @@
       </p:pic>
       <p:sp>
         <p:nvSpPr>
-          <p:cNvPr id="11" name="Shape 8"/>
-          <p:cNvSpPr/>
-          <p:nvPr/>
-        </p:nvSpPr>
-        <p:spPr>
-          <a:xfrm>
-            <a:off x="9704527" y="4198925"/>
-            <a:ext cx="1755648" cy="246888"/>
-          </a:xfrm>
-          <a:prstGeom prst="roundRect">
-            <a:avLst>
-              <a:gd name="adj" fmla="val 48148"/>
-            </a:avLst>
-          </a:prstGeom>
-          <a:solidFill>
-            <a:srgbClr val="0E1426">
-              <a:alpha val="60000"/>
-            </a:srgbClr>
-          </a:solidFill>
-          <a:ln/>
-        </p:spPr>
-      </p:sp>
-      <p:sp>
-        <p:nvSpPr>
-          <p:cNvPr id="12" name="Text 9"/>
-          <p:cNvSpPr txBox="1"/>
-          <p:nvPr/>
-        </p:nvSpPr>
-        <p:spPr>
-          <a:xfrm>
-            <a:off x="9704527" y="4198925"/>
-            <a:ext cx="1755648" cy="246888"/>
-          </a:xfrm>
-          <a:prstGeom prst="rect">
-            <a:avLst/>
-          </a:prstGeom>
-          <a:noFill/>
-          <a:ln/>
-        </p:spPr>
-        <p:txBody>
-          <a:bodyPr wrap="square" lIns="0" tIns="0" rIns="0" bIns="0" rtlCol="0" anchor="ctr"/>
-          <a:lstStyle/>
-          <a:p>
-            <a:pPr algn="ctr" indent="0" marL="0">
-              <a:buNone/>
-            </a:pPr>
-            <a:r>
-              <a:rPr lang="en-US" sz="850" dirty="0">
-                <a:solidFill>
-                  <a:srgbClr val="FFFFFF"/>
-                </a:solidFill>
-                <a:latin typeface="Calibri" pitchFamily="34" charset="0"/>
-                <a:ea typeface="Calibri" pitchFamily="34" charset="-122"/>
-                <a:cs typeface="Calibri" pitchFamily="34" charset="-120"/>
-              </a:rPr>
-              <a:t>Yapay zekâ ile üretildi</a:t>
-            </a:r>
-            <a:endParaRPr lang="en-US" sz="850" dirty="0"/>
-          </a:p>
-        </p:txBody>
-      </p:sp>
-      <p:sp>
-        <p:nvSpPr>
-          <p:cNvPr id="13" name="Text 10"/>
+          <p:cNvPr id="11" name="Text 8"/>
           <p:cNvSpPr txBox="1"/>
           <p:nvPr/>
         </p:nvSpPr>
@@ -34957,7 +34768,7 @@
                 <a:ea typeface="Calibri" pitchFamily="34" charset="-122"/>
                 <a:cs typeface="Calibri" pitchFamily="34" charset="-120"/>
               </a:rPr>
-              <a:t> oranında: elmanın konumları, sahne yapay zekâyla üretildikten sonra y = ½·g·t² bağıntısına göre yerleştirildi. Bu kuralı ikinci basamakta kanıtlayacağız.</a:t>
+              <a:t> oranında: elmaların konumları y = ½·g·t² bağıntısına göre yerleştirildi. Bu kuralı ikinci basamakta kanıtlayacağız.</a:t>
             </a:r>
             <a:endParaRPr lang="en-US" sz="1150" dirty="0"/>
           </a:p>
@@ -34965,7 +34776,7 @@
       </p:sp>
       <p:sp>
         <p:nvSpPr>
-          <p:cNvPr id="14" name="Shape 11"/>
+          <p:cNvPr id="12" name="Shape 9"/>
           <p:cNvSpPr/>
           <p:nvPr/>
         </p:nvSpPr>
@@ -34987,7 +34798,7 @@
       </p:sp>
       <p:sp>
         <p:nvSpPr>
-          <p:cNvPr id="15" name="Text 12"/>
+          <p:cNvPr id="13" name="Text 10"/>
           <p:cNvSpPr txBox="1"/>
           <p:nvPr/>
         </p:nvSpPr>
@@ -35026,7 +34837,7 @@
       </p:sp>
       <p:sp>
         <p:nvSpPr>
-          <p:cNvPr id="16" name="Text 13"/>
+          <p:cNvPr id="14" name="Text 11"/>
           <p:cNvSpPr txBox="1"/>
           <p:nvPr/>
         </p:nvSpPr>
@@ -37091,7 +36902,7 @@
       </p:sp>
       <p:pic>
         <p:nvPicPr>
-          <p:cNvPr id="12" name="Image 0" descr="/tmp/claude-1000/-opt-dersler/8a8328c3-841c-44fa-b76f-82572d338d3d/scratchpad/d4/sek/serbest-dusme-01.png">    </p:cNvPr>
+          <p:cNvPr id="12" name="Image 0" descr="/tmp/claude-1000/-opt-dersler/8a8328c3-841c-44fa-b76f-82572d338d3d/scratchpad/d5/sek/serbest-dusme-01.png">    </p:cNvPr>
           <p:cNvPicPr>
             <a:picLocks noChangeAspect="1"/>
           </p:cNvPicPr>
